--- a/Ateliê de Modelagem - Plataforma de Recrutamento e Seleção.pptx
+++ b/Ateliê de Modelagem - Plataforma de Recrutamento e Seleção.pptx
@@ -36,7 +36,7 @@
   <p:notesSz cx="6858000" cy="9144000"/>
   <p:embeddedFontLst>
     <p:embeddedFont>
-      <p:font typeface="Roboto" panose="02000000000000000000" pitchFamily="2" charset="0"/>
+      <p:font typeface="Roboto" charset="0"/>
       <p:regular r:id="rId26"/>
       <p:bold r:id="rId27"/>
       <p:italic r:id="rId28"/>
@@ -274,7 +274,7 @@
   </p:defaultTextStyle>
   <p:extLst>
     <p:ext uri="{EFAFB233-063F-42B5-8137-9DF3F51BA10A}">
-      <p15:sldGuideLst xmlns:p15="http://schemas.microsoft.com/office/powerpoint/2012/main">
+      <p15:sldGuideLst xmlns:p15="http://schemas.microsoft.com/office/powerpoint/2012/main" xmlns="">
         <p15:guide id="1" orient="horz" pos="1620">
           <p15:clr>
             <a:srgbClr val="747775"/>
@@ -1572,7 +1572,7 @@
         <p:cNvPr id="1" name="Shape 188">
           <a:extLst>
             <a:ext uri="{FF2B5EF4-FFF2-40B4-BE49-F238E27FC236}">
-              <a16:creationId xmlns:a16="http://schemas.microsoft.com/office/drawing/2014/main" id="{D981A6DC-679A-A7E2-2F29-D76D8BDC636F}"/>
+              <a16:creationId xmlns:a16="http://schemas.microsoft.com/office/drawing/2014/main" xmlns="" id="{D981A6DC-679A-A7E2-2F29-D76D8BDC636F}"/>
             </a:ext>
           </a:extLst>
         </p:cNvPr>
@@ -1592,7 +1592,7 @@
           <p:cNvPr id="189" name="Google Shape;189;g3e09a151812_0_12:notes">
             <a:extLst>
               <a:ext uri="{FF2B5EF4-FFF2-40B4-BE49-F238E27FC236}">
-                <a16:creationId xmlns:a16="http://schemas.microsoft.com/office/drawing/2014/main" id="{805E1FDD-8F0E-3EB6-039F-85FCDB59EA9B}"/>
+                <a16:creationId xmlns:a16="http://schemas.microsoft.com/office/drawing/2014/main" xmlns="" id="{805E1FDD-8F0E-3EB6-039F-85FCDB59EA9B}"/>
               </a:ext>
             </a:extLst>
           </p:cNvPr>
@@ -1639,7 +1639,7 @@
           <p:cNvPr id="190" name="Google Shape;190;g3e09a151812_0_12:notes">
             <a:extLst>
               <a:ext uri="{FF2B5EF4-FFF2-40B4-BE49-F238E27FC236}">
-                <a16:creationId xmlns:a16="http://schemas.microsoft.com/office/drawing/2014/main" id="{9F98F233-2914-773F-49F7-FCC5186A9D53}"/>
+                <a16:creationId xmlns:a16="http://schemas.microsoft.com/office/drawing/2014/main" xmlns="" id="{9F98F233-2914-773F-49F7-FCC5186A9D53}"/>
               </a:ext>
             </a:extLst>
           </p:cNvPr>
@@ -1681,7 +1681,7 @@
     </p:spTree>
     <p:extLst>
       <p:ext uri="{BB962C8B-B14F-4D97-AF65-F5344CB8AC3E}">
-        <p14:creationId xmlns:p14="http://schemas.microsoft.com/office/powerpoint/2010/main" val="46375809"/>
+        <p14:creationId xmlns:p14="http://schemas.microsoft.com/office/powerpoint/2010/main" xmlns="" val="46375809"/>
       </p:ext>
     </p:extLst>
   </p:cSld>
@@ -1699,7 +1699,7 @@
         <p:cNvPr id="1" name="Shape 188">
           <a:extLst>
             <a:ext uri="{FF2B5EF4-FFF2-40B4-BE49-F238E27FC236}">
-              <a16:creationId xmlns:a16="http://schemas.microsoft.com/office/drawing/2014/main" id="{2FE5E4EE-FAE8-9D8A-C153-883D56A0FD79}"/>
+              <a16:creationId xmlns:a16="http://schemas.microsoft.com/office/drawing/2014/main" xmlns="" id="{2FE5E4EE-FAE8-9D8A-C153-883D56A0FD79}"/>
             </a:ext>
           </a:extLst>
         </p:cNvPr>
@@ -1719,7 +1719,7 @@
           <p:cNvPr id="189" name="Google Shape;189;g3e09a151812_0_12:notes">
             <a:extLst>
               <a:ext uri="{FF2B5EF4-FFF2-40B4-BE49-F238E27FC236}">
-                <a16:creationId xmlns:a16="http://schemas.microsoft.com/office/drawing/2014/main" id="{1768BDB8-9B47-22D8-D393-68E4A9C2E55D}"/>
+                <a16:creationId xmlns:a16="http://schemas.microsoft.com/office/drawing/2014/main" xmlns="" id="{1768BDB8-9B47-22D8-D393-68E4A9C2E55D}"/>
               </a:ext>
             </a:extLst>
           </p:cNvPr>
@@ -1766,7 +1766,7 @@
           <p:cNvPr id="190" name="Google Shape;190;g3e09a151812_0_12:notes">
             <a:extLst>
               <a:ext uri="{FF2B5EF4-FFF2-40B4-BE49-F238E27FC236}">
-                <a16:creationId xmlns:a16="http://schemas.microsoft.com/office/drawing/2014/main" id="{5E250B83-D543-8154-1A5C-720012ECF9F8}"/>
+                <a16:creationId xmlns:a16="http://schemas.microsoft.com/office/drawing/2014/main" xmlns="" id="{5E250B83-D543-8154-1A5C-720012ECF9F8}"/>
               </a:ext>
             </a:extLst>
           </p:cNvPr>
@@ -1808,7 +1808,7 @@
     </p:spTree>
     <p:extLst>
       <p:ext uri="{BB962C8B-B14F-4D97-AF65-F5344CB8AC3E}">
-        <p14:creationId xmlns:p14="http://schemas.microsoft.com/office/powerpoint/2010/main" val="1955636422"/>
+        <p14:creationId xmlns:p14="http://schemas.microsoft.com/office/powerpoint/2010/main" xmlns="" val="1955636422"/>
       </p:ext>
     </p:extLst>
   </p:cSld>
@@ -1826,7 +1826,7 @@
         <p:cNvPr id="1" name="Shape 188">
           <a:extLst>
             <a:ext uri="{FF2B5EF4-FFF2-40B4-BE49-F238E27FC236}">
-              <a16:creationId xmlns:a16="http://schemas.microsoft.com/office/drawing/2014/main" id="{EB74EFAF-02F2-CBD0-ECB0-5D81181465FB}"/>
+              <a16:creationId xmlns:a16="http://schemas.microsoft.com/office/drawing/2014/main" xmlns="" id="{EB74EFAF-02F2-CBD0-ECB0-5D81181465FB}"/>
             </a:ext>
           </a:extLst>
         </p:cNvPr>
@@ -1846,7 +1846,7 @@
           <p:cNvPr id="189" name="Google Shape;189;g3e09a151812_0_12:notes">
             <a:extLst>
               <a:ext uri="{FF2B5EF4-FFF2-40B4-BE49-F238E27FC236}">
-                <a16:creationId xmlns:a16="http://schemas.microsoft.com/office/drawing/2014/main" id="{75E0C51E-EFC8-9C1D-9E6F-344F96727A29}"/>
+                <a16:creationId xmlns:a16="http://schemas.microsoft.com/office/drawing/2014/main" xmlns="" id="{75E0C51E-EFC8-9C1D-9E6F-344F96727A29}"/>
               </a:ext>
             </a:extLst>
           </p:cNvPr>
@@ -1893,7 +1893,7 @@
           <p:cNvPr id="190" name="Google Shape;190;g3e09a151812_0_12:notes">
             <a:extLst>
               <a:ext uri="{FF2B5EF4-FFF2-40B4-BE49-F238E27FC236}">
-                <a16:creationId xmlns:a16="http://schemas.microsoft.com/office/drawing/2014/main" id="{FE0540D6-09DB-DC63-3F20-DCB6A91F07F4}"/>
+                <a16:creationId xmlns:a16="http://schemas.microsoft.com/office/drawing/2014/main" xmlns="" id="{FE0540D6-09DB-DC63-3F20-DCB6A91F07F4}"/>
               </a:ext>
             </a:extLst>
           </p:cNvPr>
@@ -1935,7 +1935,7 @@
     </p:spTree>
     <p:extLst>
       <p:ext uri="{BB962C8B-B14F-4D97-AF65-F5344CB8AC3E}">
-        <p14:creationId xmlns:p14="http://schemas.microsoft.com/office/powerpoint/2010/main" val="889737434"/>
+        <p14:creationId xmlns:p14="http://schemas.microsoft.com/office/powerpoint/2010/main" xmlns="" val="889737434"/>
       </p:ext>
     </p:extLst>
   </p:cSld>
@@ -2057,7 +2057,7 @@
         <p:cNvPr id="1" name="Shape 188">
           <a:extLst>
             <a:ext uri="{FF2B5EF4-FFF2-40B4-BE49-F238E27FC236}">
-              <a16:creationId xmlns:a16="http://schemas.microsoft.com/office/drawing/2014/main" id="{2065D08B-7022-EBF3-D9C6-2D5D2C00F3D1}"/>
+              <a16:creationId xmlns:a16="http://schemas.microsoft.com/office/drawing/2014/main" xmlns="" id="{2065D08B-7022-EBF3-D9C6-2D5D2C00F3D1}"/>
             </a:ext>
           </a:extLst>
         </p:cNvPr>
@@ -2077,7 +2077,7 @@
           <p:cNvPr id="189" name="Google Shape;189;g3e09a151812_0_12:notes">
             <a:extLst>
               <a:ext uri="{FF2B5EF4-FFF2-40B4-BE49-F238E27FC236}">
-                <a16:creationId xmlns:a16="http://schemas.microsoft.com/office/drawing/2014/main" id="{E50FC743-20DF-5B04-B3C2-0F0E903DB180}"/>
+                <a16:creationId xmlns:a16="http://schemas.microsoft.com/office/drawing/2014/main" xmlns="" id="{E50FC743-20DF-5B04-B3C2-0F0E903DB180}"/>
               </a:ext>
             </a:extLst>
           </p:cNvPr>
@@ -2124,7 +2124,7 @@
           <p:cNvPr id="190" name="Google Shape;190;g3e09a151812_0_12:notes">
             <a:extLst>
               <a:ext uri="{FF2B5EF4-FFF2-40B4-BE49-F238E27FC236}">
-                <a16:creationId xmlns:a16="http://schemas.microsoft.com/office/drawing/2014/main" id="{AFC1B0B7-453E-60A4-71D2-35C25D4D87D2}"/>
+                <a16:creationId xmlns:a16="http://schemas.microsoft.com/office/drawing/2014/main" xmlns="" id="{AFC1B0B7-453E-60A4-71D2-35C25D4D87D2}"/>
               </a:ext>
             </a:extLst>
           </p:cNvPr>
@@ -2166,7 +2166,7 @@
     </p:spTree>
     <p:extLst>
       <p:ext uri="{BB962C8B-B14F-4D97-AF65-F5344CB8AC3E}">
-        <p14:creationId xmlns:p14="http://schemas.microsoft.com/office/powerpoint/2010/main" val="2527048556"/>
+        <p14:creationId xmlns:p14="http://schemas.microsoft.com/office/powerpoint/2010/main" xmlns="" val="2527048556"/>
       </p:ext>
     </p:extLst>
   </p:cSld>
@@ -2184,7 +2184,7 @@
         <p:cNvPr id="1" name="Shape 188">
           <a:extLst>
             <a:ext uri="{FF2B5EF4-FFF2-40B4-BE49-F238E27FC236}">
-              <a16:creationId xmlns:a16="http://schemas.microsoft.com/office/drawing/2014/main" id="{ED33C3D4-D188-8C4C-6AD5-02753D124F9A}"/>
+              <a16:creationId xmlns:a16="http://schemas.microsoft.com/office/drawing/2014/main" xmlns="" id="{ED33C3D4-D188-8C4C-6AD5-02753D124F9A}"/>
             </a:ext>
           </a:extLst>
         </p:cNvPr>
@@ -2204,7 +2204,7 @@
           <p:cNvPr id="189" name="Google Shape;189;g3e09a151812_0_12:notes">
             <a:extLst>
               <a:ext uri="{FF2B5EF4-FFF2-40B4-BE49-F238E27FC236}">
-                <a16:creationId xmlns:a16="http://schemas.microsoft.com/office/drawing/2014/main" id="{C1E30CA3-56C9-3D6A-9025-ADB0FF50261A}"/>
+                <a16:creationId xmlns:a16="http://schemas.microsoft.com/office/drawing/2014/main" xmlns="" id="{C1E30CA3-56C9-3D6A-9025-ADB0FF50261A}"/>
               </a:ext>
             </a:extLst>
           </p:cNvPr>
@@ -2251,7 +2251,7 @@
           <p:cNvPr id="190" name="Google Shape;190;g3e09a151812_0_12:notes">
             <a:extLst>
               <a:ext uri="{FF2B5EF4-FFF2-40B4-BE49-F238E27FC236}">
-                <a16:creationId xmlns:a16="http://schemas.microsoft.com/office/drawing/2014/main" id="{DBDCE213-925C-2B10-E668-3AE4C5CAC189}"/>
+                <a16:creationId xmlns:a16="http://schemas.microsoft.com/office/drawing/2014/main" xmlns="" id="{DBDCE213-925C-2B10-E668-3AE4C5CAC189}"/>
               </a:ext>
             </a:extLst>
           </p:cNvPr>
@@ -2293,7 +2293,7 @@
     </p:spTree>
     <p:extLst>
       <p:ext uri="{BB962C8B-B14F-4D97-AF65-F5344CB8AC3E}">
-        <p14:creationId xmlns:p14="http://schemas.microsoft.com/office/powerpoint/2010/main" val="114311738"/>
+        <p14:creationId xmlns:p14="http://schemas.microsoft.com/office/powerpoint/2010/main" xmlns="" val="114311738"/>
       </p:ext>
     </p:extLst>
   </p:cSld>
@@ -2311,7 +2311,7 @@
         <p:cNvPr id="1" name="Shape 188">
           <a:extLst>
             <a:ext uri="{FF2B5EF4-FFF2-40B4-BE49-F238E27FC236}">
-              <a16:creationId xmlns:a16="http://schemas.microsoft.com/office/drawing/2014/main" id="{A14CAAF6-40D7-255D-B309-80FA9C735EB3}"/>
+              <a16:creationId xmlns:a16="http://schemas.microsoft.com/office/drawing/2014/main" xmlns="" id="{A14CAAF6-40D7-255D-B309-80FA9C735EB3}"/>
             </a:ext>
           </a:extLst>
         </p:cNvPr>
@@ -2331,7 +2331,7 @@
           <p:cNvPr id="189" name="Google Shape;189;g3e09a151812_0_12:notes">
             <a:extLst>
               <a:ext uri="{FF2B5EF4-FFF2-40B4-BE49-F238E27FC236}">
-                <a16:creationId xmlns:a16="http://schemas.microsoft.com/office/drawing/2014/main" id="{949EFACB-0CA5-EC5D-7116-C4ABC01CA4E3}"/>
+                <a16:creationId xmlns:a16="http://schemas.microsoft.com/office/drawing/2014/main" xmlns="" id="{949EFACB-0CA5-EC5D-7116-C4ABC01CA4E3}"/>
               </a:ext>
             </a:extLst>
           </p:cNvPr>
@@ -2378,7 +2378,7 @@
           <p:cNvPr id="190" name="Google Shape;190;g3e09a151812_0_12:notes">
             <a:extLst>
               <a:ext uri="{FF2B5EF4-FFF2-40B4-BE49-F238E27FC236}">
-                <a16:creationId xmlns:a16="http://schemas.microsoft.com/office/drawing/2014/main" id="{736BC28A-985D-19DA-D9D6-F551F4A80E84}"/>
+                <a16:creationId xmlns:a16="http://schemas.microsoft.com/office/drawing/2014/main" xmlns="" id="{736BC28A-985D-19DA-D9D6-F551F4A80E84}"/>
               </a:ext>
             </a:extLst>
           </p:cNvPr>
@@ -2420,7 +2420,7 @@
     </p:spTree>
     <p:extLst>
       <p:ext uri="{BB962C8B-B14F-4D97-AF65-F5344CB8AC3E}">
-        <p14:creationId xmlns:p14="http://schemas.microsoft.com/office/powerpoint/2010/main" val="537383140"/>
+        <p14:creationId xmlns:p14="http://schemas.microsoft.com/office/powerpoint/2010/main" xmlns="" val="537383140"/>
       </p:ext>
     </p:extLst>
   </p:cSld>
@@ -3986,6 +3986,15 @@
             </a:pPr>
             <a:fld id="{00000000-1234-1234-1234-123412341234}" type="slidenum">
               <a:rPr lang="pt-BR"/>
+              <a:pPr marL="0" lvl="0" indent="0" algn="r" rtl="0">
+                <a:spcBef>
+                  <a:spcPts val="0"/>
+                </a:spcBef>
+                <a:spcAft>
+                  <a:spcPts val="0"/>
+                </a:spcAft>
+                <a:buNone/>
+              </a:pPr>
               <a:t>‹nº›</a:t>
             </a:fld>
             <a:endParaRPr/>
@@ -4699,6 +4708,15 @@
             </a:pPr>
             <a:fld id="{00000000-1234-1234-1234-123412341234}" type="slidenum">
               <a:rPr lang="pt-BR"/>
+              <a:pPr marL="0" lvl="0" indent="0" algn="r" rtl="0">
+                <a:spcBef>
+                  <a:spcPts val="0"/>
+                </a:spcBef>
+                <a:spcAft>
+                  <a:spcPts val="0"/>
+                </a:spcAft>
+                <a:buNone/>
+              </a:pPr>
               <a:t>‹nº›</a:t>
             </a:fld>
             <a:endParaRPr/>
@@ -4839,6 +4857,15 @@
             </a:pPr>
             <a:fld id="{00000000-1234-1234-1234-123412341234}" type="slidenum">
               <a:rPr lang="pt-BR"/>
+              <a:pPr marL="0" lvl="0" indent="0" algn="r" rtl="0">
+                <a:spcBef>
+                  <a:spcPts val="0"/>
+                </a:spcBef>
+                <a:spcAft>
+                  <a:spcPts val="0"/>
+                </a:spcAft>
+                <a:buNone/>
+              </a:pPr>
               <a:t>‹nº›</a:t>
             </a:fld>
             <a:endParaRPr/>
@@ -5358,6 +5385,15 @@
             </a:pPr>
             <a:fld id="{00000000-1234-1234-1234-123412341234}" type="slidenum">
               <a:rPr lang="pt-BR"/>
+              <a:pPr marL="0" lvl="0" indent="0" algn="r" rtl="0">
+                <a:spcBef>
+                  <a:spcPts val="0"/>
+                </a:spcBef>
+                <a:spcAft>
+                  <a:spcPts val="0"/>
+                </a:spcAft>
+                <a:buNone/>
+              </a:pPr>
               <a:t>‹nº›</a:t>
             </a:fld>
             <a:endParaRPr/>
@@ -5935,6 +5971,15 @@
             </a:pPr>
             <a:fld id="{00000000-1234-1234-1234-123412341234}" type="slidenum">
               <a:rPr lang="pt-BR"/>
+              <a:pPr marL="0" lvl="0" indent="0" algn="r" rtl="0">
+                <a:spcBef>
+                  <a:spcPts val="0"/>
+                </a:spcBef>
+                <a:spcAft>
+                  <a:spcPts val="0"/>
+                </a:spcAft>
+                <a:buNone/>
+              </a:pPr>
               <a:t>‹nº›</a:t>
             </a:fld>
             <a:endParaRPr/>
@@ -6462,6 +6507,15 @@
             </a:pPr>
             <a:fld id="{00000000-1234-1234-1234-123412341234}" type="slidenum">
               <a:rPr lang="pt-BR"/>
+              <a:pPr marL="0" lvl="0" indent="0" algn="r" rtl="0">
+                <a:spcBef>
+                  <a:spcPts val="0"/>
+                </a:spcBef>
+                <a:spcAft>
+                  <a:spcPts val="0"/>
+                </a:spcAft>
+                <a:buNone/>
+              </a:pPr>
               <a:t>‹nº›</a:t>
             </a:fld>
             <a:endParaRPr/>
@@ -6731,6 +6785,15 @@
             </a:pPr>
             <a:fld id="{00000000-1234-1234-1234-123412341234}" type="slidenum">
               <a:rPr lang="pt-BR"/>
+              <a:pPr marL="0" lvl="0" indent="0" algn="r" rtl="0">
+                <a:spcBef>
+                  <a:spcPts val="0"/>
+                </a:spcBef>
+                <a:spcAft>
+                  <a:spcPts val="0"/>
+                </a:spcAft>
+                <a:buNone/>
+              </a:pPr>
               <a:t>‹nº›</a:t>
             </a:fld>
             <a:endParaRPr/>
@@ -7129,6 +7192,15 @@
             </a:pPr>
             <a:fld id="{00000000-1234-1234-1234-123412341234}" type="slidenum">
               <a:rPr lang="pt-BR"/>
+              <a:pPr marL="0" lvl="0" indent="0" algn="r" rtl="0">
+                <a:spcBef>
+                  <a:spcPts val="0"/>
+                </a:spcBef>
+                <a:spcAft>
+                  <a:spcPts val="0"/>
+                </a:spcAft>
+                <a:buNone/>
+              </a:pPr>
               <a:t>‹nº›</a:t>
             </a:fld>
             <a:endParaRPr/>
@@ -7648,6 +7720,15 @@
             </a:pPr>
             <a:fld id="{00000000-1234-1234-1234-123412341234}" type="slidenum">
               <a:rPr lang="pt-BR"/>
+              <a:pPr marL="0" lvl="0" indent="0" algn="r" rtl="0">
+                <a:spcBef>
+                  <a:spcPts val="0"/>
+                </a:spcBef>
+                <a:spcAft>
+                  <a:spcPts val="0"/>
+                </a:spcAft>
+                <a:buNone/>
+              </a:pPr>
               <a:t>‹nº›</a:t>
             </a:fld>
             <a:endParaRPr/>
@@ -8295,6 +8376,15 @@
             </a:pPr>
             <a:fld id="{00000000-1234-1234-1234-123412341234}" type="slidenum">
               <a:rPr lang="pt-BR"/>
+              <a:pPr marL="0" lvl="0" indent="0" algn="r" rtl="0">
+                <a:spcBef>
+                  <a:spcPts val="0"/>
+                </a:spcBef>
+                <a:spcAft>
+                  <a:spcPts val="0"/>
+                </a:spcAft>
+                <a:buNone/>
+              </a:pPr>
               <a:t>‹nº›</a:t>
             </a:fld>
             <a:endParaRPr/>
@@ -8479,6 +8569,15 @@
             </a:pPr>
             <a:fld id="{00000000-1234-1234-1234-123412341234}" type="slidenum">
               <a:rPr lang="pt-BR"/>
+              <a:pPr marL="0" lvl="0" indent="0" algn="r" rtl="0">
+                <a:spcBef>
+                  <a:spcPts val="0"/>
+                </a:spcBef>
+                <a:spcAft>
+                  <a:spcPts val="0"/>
+                </a:spcAft>
+                <a:buNone/>
+              </a:pPr>
               <a:t>‹nº›</a:t>
             </a:fld>
             <a:endParaRPr/>
@@ -9176,6 +9275,15 @@
             </a:pPr>
             <a:fld id="{00000000-1234-1234-1234-123412341234}" type="slidenum">
               <a:rPr lang="pt-BR"/>
+              <a:pPr marL="0" lvl="0" indent="0" algn="r" rtl="0">
+                <a:spcBef>
+                  <a:spcPts val="0"/>
+                </a:spcBef>
+                <a:spcAft>
+                  <a:spcPts val="0"/>
+                </a:spcAft>
+                <a:buNone/>
+              </a:pPr>
               <a:t>‹nº›</a:t>
             </a:fld>
             <a:endParaRPr/>
@@ -9187,7 +9295,7 @@
           <p:cNvPr id="3" name="CaixaDeTexto 2">
             <a:extLst>
               <a:ext uri="{FF2B5EF4-FFF2-40B4-BE49-F238E27FC236}">
-                <a16:creationId xmlns:a16="http://schemas.microsoft.com/office/drawing/2014/main" id="{2A412038-0E64-4034-4D6A-3E54A0F081F6}"/>
+                <a16:creationId xmlns:a16="http://schemas.microsoft.com/office/drawing/2014/main" xmlns="" id="{2A412038-0E64-4034-4D6A-3E54A0F081F6}"/>
               </a:ext>
             </a:extLst>
           </p:cNvPr>
@@ -9195,7 +9303,7 @@
           <p:nvPr userDrawn="1">
             <p:extLst>
               <p:ext uri="{1162E1C5-73C7-4A58-AE30-91384D911F3F}">
-                <p184:classification xmlns:p184="http://schemas.microsoft.com/office/powerpoint/2018/4/main" val="ftr"/>
+                <p184:classification xmlns:p184="http://schemas.microsoft.com/office/powerpoint/2018/4/main" xmlns="" val="ftr"/>
               </p:ext>
             </p:extLst>
           </p:nvPr>
@@ -11587,6 +11695,7 @@
   <p:clrMapOvr>
     <a:masterClrMapping/>
   </p:clrMapOvr>
+  <p:transition/>
 </p:sld>
 </file>
 
@@ -12020,30 +12129,35 @@
       </p:sp>
       <p:pic>
         <p:nvPicPr>
-          <p:cNvPr id="180" name="Google Shape;180;p26"/>
-          <p:cNvPicPr preferRelativeResize="0"/>
+          <p:cNvPr id="2050" name="Picture 2"/>
+          <p:cNvPicPr>
+            <a:picLocks noChangeAspect="1" noChangeArrowheads="1"/>
+          </p:cNvPicPr>
           <p:nvPr/>
         </p:nvPicPr>
         <p:blipFill>
-          <a:blip r:embed="rId3">
-            <a:alphaModFix/>
-          </a:blip>
+          <a:blip r:embed="rId3"/>
+          <a:srcRect/>
           <a:stretch>
             <a:fillRect/>
           </a:stretch>
         </p:blipFill>
-        <p:spPr>
+        <p:spPr bwMode="auto">
           <a:xfrm>
-            <a:off x="280825" y="914000"/>
-            <a:ext cx="3155277" cy="3924700"/>
+            <a:off x="388618" y="923926"/>
+            <a:ext cx="2905964" cy="3886200"/>
           </a:xfrm>
           <a:prstGeom prst="rect">
             <a:avLst/>
           </a:prstGeom>
           <a:noFill/>
-          <a:ln>
+          <a:ln w="9525">
             <a:noFill/>
+            <a:miter lim="800000"/>
+            <a:headEnd/>
+            <a:tailEnd/>
           </a:ln>
+          <a:effectLst/>
         </p:spPr>
       </p:pic>
     </p:spTree>
@@ -12597,30 +12711,35 @@
       </p:sp>
       <p:pic>
         <p:nvPicPr>
-          <p:cNvPr id="187" name="Google Shape;187;p27"/>
-          <p:cNvPicPr preferRelativeResize="0"/>
+          <p:cNvPr id="5" name="Picture 2"/>
+          <p:cNvPicPr>
+            <a:picLocks noChangeAspect="1" noChangeArrowheads="1"/>
+          </p:cNvPicPr>
           <p:nvPr/>
         </p:nvPicPr>
         <p:blipFill>
-          <a:blip r:embed="rId3">
-            <a:alphaModFix/>
-          </a:blip>
+          <a:blip r:embed="rId3"/>
+          <a:srcRect/>
           <a:stretch>
             <a:fillRect/>
           </a:stretch>
         </p:blipFill>
-        <p:spPr>
+        <p:spPr bwMode="auto">
           <a:xfrm>
-            <a:off x="280825" y="914000"/>
-            <a:ext cx="3155277" cy="3924700"/>
+            <a:off x="388618" y="923926"/>
+            <a:ext cx="2905964" cy="3886200"/>
           </a:xfrm>
           <a:prstGeom prst="rect">
             <a:avLst/>
           </a:prstGeom>
           <a:noFill/>
-          <a:ln>
+          <a:ln w="9525">
             <a:noFill/>
+            <a:miter lim="800000"/>
+            <a:headEnd/>
+            <a:tailEnd/>
           </a:ln>
+          <a:effectLst/>
         </p:spPr>
       </p:pic>
     </p:spTree>
@@ -12708,30 +12827,35 @@
       </p:sp>
       <p:pic>
         <p:nvPicPr>
-          <p:cNvPr id="193" name="Google Shape;193;p28"/>
-          <p:cNvPicPr preferRelativeResize="0"/>
+          <p:cNvPr id="1027" name="Picture 3"/>
+          <p:cNvPicPr>
+            <a:picLocks noChangeAspect="1" noChangeArrowheads="1"/>
+          </p:cNvPicPr>
           <p:nvPr/>
         </p:nvPicPr>
         <p:blipFill>
-          <a:blip r:embed="rId3">
-            <a:alphaModFix/>
-          </a:blip>
+          <a:blip r:embed="rId3"/>
+          <a:srcRect/>
           <a:stretch>
             <a:fillRect/>
           </a:stretch>
         </p:blipFill>
-        <p:spPr>
+        <p:spPr bwMode="auto">
           <a:xfrm>
-            <a:off x="3401575" y="0"/>
-            <a:ext cx="5569657" cy="5143500"/>
+            <a:off x="2993366" y="0"/>
+            <a:ext cx="5664859" cy="5143500"/>
           </a:xfrm>
           <a:prstGeom prst="rect">
             <a:avLst/>
           </a:prstGeom>
           <a:noFill/>
-          <a:ln>
+          <a:ln w="9525">
             <a:noFill/>
+            <a:miter lim="800000"/>
+            <a:headEnd/>
+            <a:tailEnd/>
           </a:ln>
+          <a:effectLst/>
         </p:spPr>
       </p:pic>
     </p:spTree>
@@ -12739,18 +12863,25 @@
   <p:clrMapOvr>
     <a:masterClrMapping/>
   </p:clrMapOvr>
+  <p:timing>
+    <p:tnLst>
+      <p:par>
+        <p:cTn id="1" dur="indefinite" restart="never" nodeType="tmRoot"/>
+      </p:par>
+    </p:tnLst>
+  </p:timing>
 </p:sld>
 </file>
 
 <file path=ppt/slides/slide17.xml><?xml version="1.0" encoding="utf-8"?>
-<p:sld xmlns:a="http://schemas.openxmlformats.org/drawingml/2006/main" xmlns:r="http://schemas.openxmlformats.org/officeDocument/2006/relationships" xmlns:p="http://schemas.openxmlformats.org/presentationml/2006/main">
+<p:sld xmlns:a="http://schemas.openxmlformats.org/drawingml/2006/main" xmlns:r="http://schemas.openxmlformats.org/officeDocument/2006/relationships" xmlns:p="http://schemas.openxmlformats.org/presentationml/2006/main" show="0">
   <p:cSld>
     <p:spTree>
       <p:nvGrpSpPr>
         <p:cNvPr id="1" name="Shape 191">
           <a:extLst>
             <a:ext uri="{FF2B5EF4-FFF2-40B4-BE49-F238E27FC236}">
-              <a16:creationId xmlns:a16="http://schemas.microsoft.com/office/drawing/2014/main" id="{74533CBB-B36C-DB72-6382-5B2BB7BBE2A3}"/>
+              <a16:creationId xmlns:a16="http://schemas.microsoft.com/office/drawing/2014/main" xmlns="" id="{74533CBB-B36C-DB72-6382-5B2BB7BBE2A3}"/>
             </a:ext>
           </a:extLst>
         </p:cNvPr>
@@ -12770,7 +12901,7 @@
           <p:cNvPr id="192" name="Google Shape;192;p28">
             <a:extLst>
               <a:ext uri="{FF2B5EF4-FFF2-40B4-BE49-F238E27FC236}">
-                <a16:creationId xmlns:a16="http://schemas.microsoft.com/office/drawing/2014/main" id="{9FFC3655-397D-4DE4-5CC8-53D5D91AE704}"/>
+                <a16:creationId xmlns:a16="http://schemas.microsoft.com/office/drawing/2014/main" xmlns="" id="{9FFC3655-397D-4DE4-5CC8-53D5D91AE704}"/>
               </a:ext>
             </a:extLst>
           </p:cNvPr>
@@ -12818,7 +12949,7 @@
           <p:cNvPr id="9" name="CaixaDeTexto 8">
             <a:extLst>
               <a:ext uri="{FF2B5EF4-FFF2-40B4-BE49-F238E27FC236}">
-                <a16:creationId xmlns:a16="http://schemas.microsoft.com/office/drawing/2014/main" id="{81A8D00C-5525-AF43-9192-937471725549}"/>
+                <a16:creationId xmlns:a16="http://schemas.microsoft.com/office/drawing/2014/main" xmlns="" id="{81A8D00C-5525-AF43-9192-937471725549}"/>
               </a:ext>
             </a:extLst>
           </p:cNvPr>
@@ -12969,7 +13100,7 @@
           <p:cNvPr id="10" name="CaixaDeTexto 9">
             <a:extLst>
               <a:ext uri="{FF2B5EF4-FFF2-40B4-BE49-F238E27FC236}">
-                <a16:creationId xmlns:a16="http://schemas.microsoft.com/office/drawing/2014/main" id="{259BA3D4-0399-D5C1-4A61-FC98FCB54F67}"/>
+                <a16:creationId xmlns:a16="http://schemas.microsoft.com/office/drawing/2014/main" xmlns="" id="{259BA3D4-0399-D5C1-4A61-FC98FCB54F67}"/>
               </a:ext>
             </a:extLst>
           </p:cNvPr>
@@ -13050,7 +13181,7 @@
           <p:cNvPr id="12" name="CaixaDeTexto 11">
             <a:extLst>
               <a:ext uri="{FF2B5EF4-FFF2-40B4-BE49-F238E27FC236}">
-                <a16:creationId xmlns:a16="http://schemas.microsoft.com/office/drawing/2014/main" id="{8D7F7359-5DF3-6974-6DDE-B741E0C66EE4}"/>
+                <a16:creationId xmlns:a16="http://schemas.microsoft.com/office/drawing/2014/main" xmlns="" id="{8D7F7359-5DF3-6974-6DDE-B741E0C66EE4}"/>
               </a:ext>
             </a:extLst>
           </p:cNvPr>
@@ -13123,25 +13254,33 @@
     </p:spTree>
     <p:extLst>
       <p:ext uri="{BB962C8B-B14F-4D97-AF65-F5344CB8AC3E}">
-        <p14:creationId xmlns:p14="http://schemas.microsoft.com/office/powerpoint/2010/main" val="635496334"/>
+        <p14:creationId xmlns:p14="http://schemas.microsoft.com/office/powerpoint/2010/main" xmlns="" val="635496334"/>
       </p:ext>
     </p:extLst>
   </p:cSld>
   <p:clrMapOvr>
     <a:masterClrMapping/>
   </p:clrMapOvr>
+  <p:transition/>
+  <p:timing>
+    <p:tnLst>
+      <p:par>
+        <p:cTn id="1" dur="indefinite" restart="never" nodeType="tmRoot"/>
+      </p:par>
+    </p:tnLst>
+  </p:timing>
 </p:sld>
 </file>
 
 <file path=ppt/slides/slide18.xml><?xml version="1.0" encoding="utf-8"?>
-<p:sld xmlns:a="http://schemas.openxmlformats.org/drawingml/2006/main" xmlns:r="http://schemas.openxmlformats.org/officeDocument/2006/relationships" xmlns:p="http://schemas.openxmlformats.org/presentationml/2006/main">
+<p:sld xmlns:a="http://schemas.openxmlformats.org/drawingml/2006/main" xmlns:r="http://schemas.openxmlformats.org/officeDocument/2006/relationships" xmlns:p="http://schemas.openxmlformats.org/presentationml/2006/main" show="0">
   <p:cSld>
     <p:spTree>
       <p:nvGrpSpPr>
         <p:cNvPr id="1" name="Shape 191">
           <a:extLst>
             <a:ext uri="{FF2B5EF4-FFF2-40B4-BE49-F238E27FC236}">
-              <a16:creationId xmlns:a16="http://schemas.microsoft.com/office/drawing/2014/main" id="{4A8E5297-39CD-22EB-BDFF-2CAD4C0F86AB}"/>
+              <a16:creationId xmlns:a16="http://schemas.microsoft.com/office/drawing/2014/main" xmlns="" id="{4A8E5297-39CD-22EB-BDFF-2CAD4C0F86AB}"/>
             </a:ext>
           </a:extLst>
         </p:cNvPr>
@@ -13161,7 +13300,7 @@
           <p:cNvPr id="192" name="Google Shape;192;p28">
             <a:extLst>
               <a:ext uri="{FF2B5EF4-FFF2-40B4-BE49-F238E27FC236}">
-                <a16:creationId xmlns:a16="http://schemas.microsoft.com/office/drawing/2014/main" id="{5286139D-4DE6-CEA2-161D-938308C7212E}"/>
+                <a16:creationId xmlns:a16="http://schemas.microsoft.com/office/drawing/2014/main" xmlns="" id="{5286139D-4DE6-CEA2-161D-938308C7212E}"/>
               </a:ext>
             </a:extLst>
           </p:cNvPr>
@@ -13209,7 +13348,7 @@
           <p:cNvPr id="5" name="CaixaDeTexto 4">
             <a:extLst>
               <a:ext uri="{FF2B5EF4-FFF2-40B4-BE49-F238E27FC236}">
-                <a16:creationId xmlns:a16="http://schemas.microsoft.com/office/drawing/2014/main" id="{FA828EF3-1DFD-3E50-7E1F-5E17B39BB2A0}"/>
+                <a16:creationId xmlns:a16="http://schemas.microsoft.com/office/drawing/2014/main" xmlns="" id="{FA828EF3-1DFD-3E50-7E1F-5E17B39BB2A0}"/>
               </a:ext>
             </a:extLst>
           </p:cNvPr>
@@ -13344,7 +13483,7 @@
           <p:cNvPr id="7" name="CaixaDeTexto 6">
             <a:extLst>
               <a:ext uri="{FF2B5EF4-FFF2-40B4-BE49-F238E27FC236}">
-                <a16:creationId xmlns:a16="http://schemas.microsoft.com/office/drawing/2014/main" id="{B6D0AC37-4CA8-6A8F-31D4-C74ABB6DD7B8}"/>
+                <a16:creationId xmlns:a16="http://schemas.microsoft.com/office/drawing/2014/main" xmlns="" id="{B6D0AC37-4CA8-6A8F-31D4-C74ABB6DD7B8}"/>
               </a:ext>
             </a:extLst>
           </p:cNvPr>
@@ -13433,7 +13572,7 @@
           <p:cNvPr id="10" name="CaixaDeTexto 9">
             <a:extLst>
               <a:ext uri="{FF2B5EF4-FFF2-40B4-BE49-F238E27FC236}">
-                <a16:creationId xmlns:a16="http://schemas.microsoft.com/office/drawing/2014/main" id="{713F1DDC-DE03-2F1D-28DF-5BFC4D7BE734}"/>
+                <a16:creationId xmlns:a16="http://schemas.microsoft.com/office/drawing/2014/main" xmlns="" id="{713F1DDC-DE03-2F1D-28DF-5BFC4D7BE734}"/>
               </a:ext>
             </a:extLst>
           </p:cNvPr>
@@ -13518,25 +13657,26 @@
     </p:spTree>
     <p:extLst>
       <p:ext uri="{BB962C8B-B14F-4D97-AF65-F5344CB8AC3E}">
-        <p14:creationId xmlns:p14="http://schemas.microsoft.com/office/powerpoint/2010/main" val="1724115355"/>
+        <p14:creationId xmlns:p14="http://schemas.microsoft.com/office/powerpoint/2010/main" xmlns="" val="1724115355"/>
       </p:ext>
     </p:extLst>
   </p:cSld>
   <p:clrMapOvr>
     <a:masterClrMapping/>
   </p:clrMapOvr>
+  <p:transition/>
 </p:sld>
 </file>
 
 <file path=ppt/slides/slide19.xml><?xml version="1.0" encoding="utf-8"?>
-<p:sld xmlns:a="http://schemas.openxmlformats.org/drawingml/2006/main" xmlns:r="http://schemas.openxmlformats.org/officeDocument/2006/relationships" xmlns:p="http://schemas.openxmlformats.org/presentationml/2006/main">
+<p:sld xmlns:a="http://schemas.openxmlformats.org/drawingml/2006/main" xmlns:r="http://schemas.openxmlformats.org/officeDocument/2006/relationships" xmlns:p="http://schemas.openxmlformats.org/presentationml/2006/main" show="0">
   <p:cSld>
     <p:spTree>
       <p:nvGrpSpPr>
         <p:cNvPr id="1" name="Shape 191">
           <a:extLst>
             <a:ext uri="{FF2B5EF4-FFF2-40B4-BE49-F238E27FC236}">
-              <a16:creationId xmlns:a16="http://schemas.microsoft.com/office/drawing/2014/main" id="{3C1844CF-E21B-D97C-7654-6CE5433B3EDF}"/>
+              <a16:creationId xmlns:a16="http://schemas.microsoft.com/office/drawing/2014/main" xmlns="" id="{3C1844CF-E21B-D97C-7654-6CE5433B3EDF}"/>
             </a:ext>
           </a:extLst>
         </p:cNvPr>
@@ -13556,7 +13696,7 @@
           <p:cNvPr id="192" name="Google Shape;192;p28">
             <a:extLst>
               <a:ext uri="{FF2B5EF4-FFF2-40B4-BE49-F238E27FC236}">
-                <a16:creationId xmlns:a16="http://schemas.microsoft.com/office/drawing/2014/main" id="{18CBF70B-AA45-4D76-25D6-7CE0DFD8AF07}"/>
+                <a16:creationId xmlns:a16="http://schemas.microsoft.com/office/drawing/2014/main" xmlns="" id="{18CBF70B-AA45-4D76-25D6-7CE0DFD8AF07}"/>
               </a:ext>
             </a:extLst>
           </p:cNvPr>
@@ -13604,7 +13744,7 @@
           <p:cNvPr id="3" name="CaixaDeTexto 2">
             <a:extLst>
               <a:ext uri="{FF2B5EF4-FFF2-40B4-BE49-F238E27FC236}">
-                <a16:creationId xmlns:a16="http://schemas.microsoft.com/office/drawing/2014/main" id="{A21FEBE2-2B6D-8DB2-83FE-AA6D12BC0CFD}"/>
+                <a16:creationId xmlns:a16="http://schemas.microsoft.com/office/drawing/2014/main" xmlns="" id="{A21FEBE2-2B6D-8DB2-83FE-AA6D12BC0CFD}"/>
               </a:ext>
             </a:extLst>
           </p:cNvPr>
@@ -13711,7 +13851,7 @@
           <p:cNvPr id="6" name="CaixaDeTexto 5">
             <a:extLst>
               <a:ext uri="{FF2B5EF4-FFF2-40B4-BE49-F238E27FC236}">
-                <a16:creationId xmlns:a16="http://schemas.microsoft.com/office/drawing/2014/main" id="{C4A51A08-6721-D101-EE4F-92F3A1A1F849}"/>
+                <a16:creationId xmlns:a16="http://schemas.microsoft.com/office/drawing/2014/main" xmlns="" id="{C4A51A08-6721-D101-EE4F-92F3A1A1F849}"/>
               </a:ext>
             </a:extLst>
           </p:cNvPr>
@@ -13786,7 +13926,7 @@
           <p:cNvPr id="9" name="CaixaDeTexto 8">
             <a:extLst>
               <a:ext uri="{FF2B5EF4-FFF2-40B4-BE49-F238E27FC236}">
-                <a16:creationId xmlns:a16="http://schemas.microsoft.com/office/drawing/2014/main" id="{DE4A7D3E-75D3-723F-03EB-C75D4E9D035A}"/>
+                <a16:creationId xmlns:a16="http://schemas.microsoft.com/office/drawing/2014/main" xmlns="" id="{DE4A7D3E-75D3-723F-03EB-C75D4E9D035A}"/>
               </a:ext>
             </a:extLst>
           </p:cNvPr>
@@ -13861,7 +14001,7 @@
           <p:cNvPr id="11" name="CaixaDeTexto 10">
             <a:extLst>
               <a:ext uri="{FF2B5EF4-FFF2-40B4-BE49-F238E27FC236}">
-                <a16:creationId xmlns:a16="http://schemas.microsoft.com/office/drawing/2014/main" id="{533A9E1A-C7B8-892E-6EC4-EC8A01F8AD58}"/>
+                <a16:creationId xmlns:a16="http://schemas.microsoft.com/office/drawing/2014/main" xmlns="" id="{533A9E1A-C7B8-892E-6EC4-EC8A01F8AD58}"/>
               </a:ext>
             </a:extLst>
           </p:cNvPr>
@@ -14026,13 +14166,14 @@
     </p:spTree>
     <p:extLst>
       <p:ext uri="{BB962C8B-B14F-4D97-AF65-F5344CB8AC3E}">
-        <p14:creationId xmlns:p14="http://schemas.microsoft.com/office/powerpoint/2010/main" val="1703921252"/>
+        <p14:creationId xmlns:p14="http://schemas.microsoft.com/office/powerpoint/2010/main" xmlns="" val="1703921252"/>
       </p:ext>
     </p:extLst>
   </p:cSld>
   <p:clrMapOvr>
     <a:masterClrMapping/>
   </p:clrMapOvr>
+  <p:transition/>
 </p:sld>
 </file>
 
@@ -14097,7 +14238,7 @@
       </p:sp>
       <p:pic>
         <p:nvPicPr>
-          <p:cNvPr id="93" name="Google Shape;93;p14" title="modelo conceitual.jpg"/>
+          <p:cNvPr id="93" name="Google Shape;93;p14"/>
           <p:cNvPicPr preferRelativeResize="0"/>
           <p:nvPr/>
         </p:nvPicPr>
@@ -14131,14 +14272,14 @@
 </file>
 
 <file path=ppt/slides/slide20.xml><?xml version="1.0" encoding="utf-8"?>
-<p:sld xmlns:a="http://schemas.openxmlformats.org/drawingml/2006/main" xmlns:r="http://schemas.openxmlformats.org/officeDocument/2006/relationships" xmlns:p="http://schemas.openxmlformats.org/presentationml/2006/main">
+<p:sld xmlns:a="http://schemas.openxmlformats.org/drawingml/2006/main" xmlns:r="http://schemas.openxmlformats.org/officeDocument/2006/relationships" xmlns:p="http://schemas.openxmlformats.org/presentationml/2006/main" show="0">
   <p:cSld>
     <p:spTree>
       <p:nvGrpSpPr>
         <p:cNvPr id="1" name="Shape 191">
           <a:extLst>
             <a:ext uri="{FF2B5EF4-FFF2-40B4-BE49-F238E27FC236}">
-              <a16:creationId xmlns:a16="http://schemas.microsoft.com/office/drawing/2014/main" id="{1A3151B4-A415-B734-C775-623E13F50C9D}"/>
+              <a16:creationId xmlns:a16="http://schemas.microsoft.com/office/drawing/2014/main" xmlns="" id="{1A3151B4-A415-B734-C775-623E13F50C9D}"/>
             </a:ext>
           </a:extLst>
         </p:cNvPr>
@@ -14158,7 +14299,7 @@
           <p:cNvPr id="192" name="Google Shape;192;p28">
             <a:extLst>
               <a:ext uri="{FF2B5EF4-FFF2-40B4-BE49-F238E27FC236}">
-                <a16:creationId xmlns:a16="http://schemas.microsoft.com/office/drawing/2014/main" id="{490BD549-ED2C-D14B-452E-1E193084A45D}"/>
+                <a16:creationId xmlns:a16="http://schemas.microsoft.com/office/drawing/2014/main" xmlns="" id="{490BD549-ED2C-D14B-452E-1E193084A45D}"/>
               </a:ext>
             </a:extLst>
           </p:cNvPr>
@@ -14206,7 +14347,7 @@
           <p:cNvPr id="4" name="CaixaDeTexto 3">
             <a:extLst>
               <a:ext uri="{FF2B5EF4-FFF2-40B4-BE49-F238E27FC236}">
-                <a16:creationId xmlns:a16="http://schemas.microsoft.com/office/drawing/2014/main" id="{2306AD4E-61D9-3A73-6C34-D2560421C50F}"/>
+                <a16:creationId xmlns:a16="http://schemas.microsoft.com/office/drawing/2014/main" xmlns="" id="{2306AD4E-61D9-3A73-6C34-D2560421C50F}"/>
               </a:ext>
             </a:extLst>
           </p:cNvPr>
@@ -14307,7 +14448,7 @@
           <p:cNvPr id="7" name="CaixaDeTexto 6">
             <a:extLst>
               <a:ext uri="{FF2B5EF4-FFF2-40B4-BE49-F238E27FC236}">
-                <a16:creationId xmlns:a16="http://schemas.microsoft.com/office/drawing/2014/main" id="{E9AF0DFC-C15F-2E38-7A75-E33A0BC8C6D5}"/>
+                <a16:creationId xmlns:a16="http://schemas.microsoft.com/office/drawing/2014/main" xmlns="" id="{E9AF0DFC-C15F-2E38-7A75-E33A0BC8C6D5}"/>
               </a:ext>
             </a:extLst>
           </p:cNvPr>
@@ -14412,7 +14553,7 @@
           <p:cNvPr id="10" name="CaixaDeTexto 9">
             <a:extLst>
               <a:ext uri="{FF2B5EF4-FFF2-40B4-BE49-F238E27FC236}">
-                <a16:creationId xmlns:a16="http://schemas.microsoft.com/office/drawing/2014/main" id="{63EF9938-EAE1-D937-61D4-9A2BC7615B97}"/>
+                <a16:creationId xmlns:a16="http://schemas.microsoft.com/office/drawing/2014/main" xmlns="" id="{63EF9938-EAE1-D937-61D4-9A2BC7615B97}"/>
               </a:ext>
             </a:extLst>
           </p:cNvPr>
@@ -14497,25 +14638,26 @@
     </p:spTree>
     <p:extLst>
       <p:ext uri="{BB962C8B-B14F-4D97-AF65-F5344CB8AC3E}">
-        <p14:creationId xmlns:p14="http://schemas.microsoft.com/office/powerpoint/2010/main" val="2522666203"/>
+        <p14:creationId xmlns:p14="http://schemas.microsoft.com/office/powerpoint/2010/main" xmlns="" val="2522666203"/>
       </p:ext>
     </p:extLst>
   </p:cSld>
   <p:clrMapOvr>
     <a:masterClrMapping/>
   </p:clrMapOvr>
+  <p:transition/>
 </p:sld>
 </file>
 
 <file path=ppt/slides/slide21.xml><?xml version="1.0" encoding="utf-8"?>
-<p:sld xmlns:a="http://schemas.openxmlformats.org/drawingml/2006/main" xmlns:r="http://schemas.openxmlformats.org/officeDocument/2006/relationships" xmlns:p="http://schemas.openxmlformats.org/presentationml/2006/main">
+<p:sld xmlns:a="http://schemas.openxmlformats.org/drawingml/2006/main" xmlns:r="http://schemas.openxmlformats.org/officeDocument/2006/relationships" xmlns:p="http://schemas.openxmlformats.org/presentationml/2006/main" show="0">
   <p:cSld>
     <p:spTree>
       <p:nvGrpSpPr>
         <p:cNvPr id="1" name="Shape 191">
           <a:extLst>
             <a:ext uri="{FF2B5EF4-FFF2-40B4-BE49-F238E27FC236}">
-              <a16:creationId xmlns:a16="http://schemas.microsoft.com/office/drawing/2014/main" id="{DFB41B21-F7FA-27A8-7AA0-462060B50FB4}"/>
+              <a16:creationId xmlns:a16="http://schemas.microsoft.com/office/drawing/2014/main" xmlns="" id="{DFB41B21-F7FA-27A8-7AA0-462060B50FB4}"/>
             </a:ext>
           </a:extLst>
         </p:cNvPr>
@@ -14535,7 +14677,7 @@
           <p:cNvPr id="192" name="Google Shape;192;p28">
             <a:extLst>
               <a:ext uri="{FF2B5EF4-FFF2-40B4-BE49-F238E27FC236}">
-                <a16:creationId xmlns:a16="http://schemas.microsoft.com/office/drawing/2014/main" id="{75C65ADC-06BC-4EF3-F567-C0E846487954}"/>
+                <a16:creationId xmlns:a16="http://schemas.microsoft.com/office/drawing/2014/main" xmlns="" id="{75C65ADC-06BC-4EF3-F567-C0E846487954}"/>
               </a:ext>
             </a:extLst>
           </p:cNvPr>
@@ -14583,7 +14725,7 @@
           <p:cNvPr id="3" name="CaixaDeTexto 2">
             <a:extLst>
               <a:ext uri="{FF2B5EF4-FFF2-40B4-BE49-F238E27FC236}">
-                <a16:creationId xmlns:a16="http://schemas.microsoft.com/office/drawing/2014/main" id="{165F3292-6375-BFD9-AC8F-12C21EBA299B}"/>
+                <a16:creationId xmlns:a16="http://schemas.microsoft.com/office/drawing/2014/main" xmlns="" id="{165F3292-6375-BFD9-AC8F-12C21EBA299B}"/>
               </a:ext>
             </a:extLst>
           </p:cNvPr>
@@ -14774,7 +14916,7 @@
           <p:cNvPr id="6" name="CaixaDeTexto 5">
             <a:extLst>
               <a:ext uri="{FF2B5EF4-FFF2-40B4-BE49-F238E27FC236}">
-                <a16:creationId xmlns:a16="http://schemas.microsoft.com/office/drawing/2014/main" id="{D21F287D-7D50-267F-4307-1C43596CEF87}"/>
+                <a16:creationId xmlns:a16="http://schemas.microsoft.com/office/drawing/2014/main" xmlns="" id="{D21F287D-7D50-267F-4307-1C43596CEF87}"/>
               </a:ext>
             </a:extLst>
           </p:cNvPr>
@@ -14877,7 +15019,7 @@
           <p:cNvPr id="9" name="CaixaDeTexto 8">
             <a:extLst>
               <a:ext uri="{FF2B5EF4-FFF2-40B4-BE49-F238E27FC236}">
-                <a16:creationId xmlns:a16="http://schemas.microsoft.com/office/drawing/2014/main" id="{53A1F8AC-5BDF-B2D5-8718-5645ADC24E22}"/>
+                <a16:creationId xmlns:a16="http://schemas.microsoft.com/office/drawing/2014/main" xmlns="" id="{53A1F8AC-5BDF-B2D5-8718-5645ADC24E22}"/>
               </a:ext>
             </a:extLst>
           </p:cNvPr>
@@ -14952,7 +15094,7 @@
           <p:cNvPr id="12" name="CaixaDeTexto 11">
             <a:extLst>
               <a:ext uri="{FF2B5EF4-FFF2-40B4-BE49-F238E27FC236}">
-                <a16:creationId xmlns:a16="http://schemas.microsoft.com/office/drawing/2014/main" id="{D338F249-F39A-D343-1F44-22ECC01B73DA}"/>
+                <a16:creationId xmlns:a16="http://schemas.microsoft.com/office/drawing/2014/main" xmlns="" id="{D338F249-F39A-D343-1F44-22ECC01B73DA}"/>
               </a:ext>
             </a:extLst>
           </p:cNvPr>
@@ -15025,25 +15167,26 @@
     </p:spTree>
     <p:extLst>
       <p:ext uri="{BB962C8B-B14F-4D97-AF65-F5344CB8AC3E}">
-        <p14:creationId xmlns:p14="http://schemas.microsoft.com/office/powerpoint/2010/main" val="3841684253"/>
+        <p14:creationId xmlns:p14="http://schemas.microsoft.com/office/powerpoint/2010/main" xmlns="" val="3841684253"/>
       </p:ext>
     </p:extLst>
   </p:cSld>
   <p:clrMapOvr>
     <a:masterClrMapping/>
   </p:clrMapOvr>
+  <p:transition/>
 </p:sld>
 </file>
 
 <file path=ppt/slides/slide22.xml><?xml version="1.0" encoding="utf-8"?>
-<p:sld xmlns:a="http://schemas.openxmlformats.org/drawingml/2006/main" xmlns:r="http://schemas.openxmlformats.org/officeDocument/2006/relationships" xmlns:p="http://schemas.openxmlformats.org/presentationml/2006/main">
+<p:sld xmlns:a="http://schemas.openxmlformats.org/drawingml/2006/main" xmlns:r="http://schemas.openxmlformats.org/officeDocument/2006/relationships" xmlns:p="http://schemas.openxmlformats.org/presentationml/2006/main" show="0">
   <p:cSld>
     <p:spTree>
       <p:nvGrpSpPr>
         <p:cNvPr id="1" name="Shape 191">
           <a:extLst>
             <a:ext uri="{FF2B5EF4-FFF2-40B4-BE49-F238E27FC236}">
-              <a16:creationId xmlns:a16="http://schemas.microsoft.com/office/drawing/2014/main" id="{60FACB76-2A91-4871-814E-988E6C9D39E9}"/>
+              <a16:creationId xmlns:a16="http://schemas.microsoft.com/office/drawing/2014/main" xmlns="" id="{60FACB76-2A91-4871-814E-988E6C9D39E9}"/>
             </a:ext>
           </a:extLst>
         </p:cNvPr>
@@ -15063,7 +15206,7 @@
           <p:cNvPr id="192" name="Google Shape;192;p28">
             <a:extLst>
               <a:ext uri="{FF2B5EF4-FFF2-40B4-BE49-F238E27FC236}">
-                <a16:creationId xmlns:a16="http://schemas.microsoft.com/office/drawing/2014/main" id="{F20F2E6F-1971-F543-C12D-C3350A689E3E}"/>
+                <a16:creationId xmlns:a16="http://schemas.microsoft.com/office/drawing/2014/main" xmlns="" id="{F20F2E6F-1971-F543-C12D-C3350A689E3E}"/>
               </a:ext>
             </a:extLst>
           </p:cNvPr>
@@ -15111,7 +15254,7 @@
           <p:cNvPr id="4" name="CaixaDeTexto 3">
             <a:extLst>
               <a:ext uri="{FF2B5EF4-FFF2-40B4-BE49-F238E27FC236}">
-                <a16:creationId xmlns:a16="http://schemas.microsoft.com/office/drawing/2014/main" id="{5B67F29B-D7FF-7AC2-C10C-C1D62B04C555}"/>
+                <a16:creationId xmlns:a16="http://schemas.microsoft.com/office/drawing/2014/main" xmlns="" id="{5B67F29B-D7FF-7AC2-C10C-C1D62B04C555}"/>
               </a:ext>
             </a:extLst>
           </p:cNvPr>
@@ -15186,7 +15329,7 @@
           <p:cNvPr id="7" name="CaixaDeTexto 6">
             <a:extLst>
               <a:ext uri="{FF2B5EF4-FFF2-40B4-BE49-F238E27FC236}">
-                <a16:creationId xmlns:a16="http://schemas.microsoft.com/office/drawing/2014/main" id="{DC2C5A8E-E538-E2CE-F29E-605F8110845E}"/>
+                <a16:creationId xmlns:a16="http://schemas.microsoft.com/office/drawing/2014/main" xmlns="" id="{DC2C5A8E-E538-E2CE-F29E-605F8110845E}"/>
               </a:ext>
             </a:extLst>
           </p:cNvPr>
@@ -15711,13 +15854,14 @@
     </p:spTree>
     <p:extLst>
       <p:ext uri="{BB962C8B-B14F-4D97-AF65-F5344CB8AC3E}">
-        <p14:creationId xmlns:p14="http://schemas.microsoft.com/office/powerpoint/2010/main" val="2972871009"/>
+        <p14:creationId xmlns:p14="http://schemas.microsoft.com/office/powerpoint/2010/main" xmlns="" val="2972871009"/>
       </p:ext>
     </p:extLst>
   </p:cSld>
   <p:clrMapOvr>
     <a:masterClrMapping/>
   </p:clrMapOvr>
+  <p:transition/>
 </p:sld>
 </file>
 
@@ -15849,7 +15993,7 @@
       </p:sp>
       <p:pic>
         <p:nvPicPr>
-          <p:cNvPr id="99" name="Google Shape;99;p15" title="modelo lógico.jpg"/>
+          <p:cNvPr id="99" name="Google Shape;99;p15"/>
           <p:cNvPicPr preferRelativeResize="0"/>
           <p:nvPr/>
         </p:nvPicPr>
